--- a/public/videos/repositories/itshikaku-shindan/itshikaku-shindan-tech-preview.pptx
+++ b/public/videos/repositories/itshikaku-shindan/itshikaku-shindan-tech-preview.pptx
@@ -134,7 +134,7 @@
           <p:cNvPr id="2" name="タイトル 1">
             <a:extLst>
               <a:ext uri="{FF2B5EF4-FFF2-40B4-BE49-F238E27FC236}">
-                <a16:creationId xmlns:a16="http://schemas.microsoft.com/office/drawing/2014/main" id="{05239B99-E68F-A3CB-02AB-1EFAC46EBE61}"/>
+                <a16:creationId xmlns:a16="http://schemas.microsoft.com/office/drawing/2014/main" id="{256E0296-3B48-5FE7-4A30-97EB7CAF2F33}"/>
               </a:ext>
             </a:extLst>
           </p:cNvPr>
@@ -171,7 +171,7 @@
           <p:cNvPr id="3" name="字幕 2">
             <a:extLst>
               <a:ext uri="{FF2B5EF4-FFF2-40B4-BE49-F238E27FC236}">
-                <a16:creationId xmlns:a16="http://schemas.microsoft.com/office/drawing/2014/main" id="{64A4B40F-2270-A4B2-E971-6FA276E772EB}"/>
+                <a16:creationId xmlns:a16="http://schemas.microsoft.com/office/drawing/2014/main" id="{1094E0F4-53AE-AE3B-B63F-7BC180E59F76}"/>
               </a:ext>
             </a:extLst>
           </p:cNvPr>
@@ -241,7 +241,7 @@
           <p:cNvPr id="4" name="日付プレースホルダー 3">
             <a:extLst>
               <a:ext uri="{FF2B5EF4-FFF2-40B4-BE49-F238E27FC236}">
-                <a16:creationId xmlns:a16="http://schemas.microsoft.com/office/drawing/2014/main" id="{E2226B46-275E-D06C-BD9D-69A262EC865D}"/>
+                <a16:creationId xmlns:a16="http://schemas.microsoft.com/office/drawing/2014/main" id="{D1688BE3-40B6-A5F5-8208-B3B601B82F16}"/>
               </a:ext>
             </a:extLst>
           </p:cNvPr>
@@ -257,7 +257,7 @@
           <a:bodyPr/>
           <a:lstStyle/>
           <a:p>
-            <a:fld id="{53E29992-8088-4498-809B-59D2E69B1D72}" type="datetimeFigureOut">
+            <a:fld id="{88781E49-F59F-4DF2-B19A-55516FFF4ED4}" type="datetimeFigureOut">
               <a:rPr kumimoji="1" lang="ja-JP" altLang="en-US" smtClean="0"/>
               <a:t>2026/7/30</a:t>
             </a:fld>
@@ -270,7 +270,7 @@
           <p:cNvPr id="5" name="フッター プレースホルダー 4">
             <a:extLst>
               <a:ext uri="{FF2B5EF4-FFF2-40B4-BE49-F238E27FC236}">
-                <a16:creationId xmlns:a16="http://schemas.microsoft.com/office/drawing/2014/main" id="{AB6D750A-CF24-F048-76E1-5A9C5C5BDB14}"/>
+                <a16:creationId xmlns:a16="http://schemas.microsoft.com/office/drawing/2014/main" id="{26A285DC-F028-CC78-5B7B-223D86591E6A}"/>
               </a:ext>
             </a:extLst>
           </p:cNvPr>
@@ -295,7 +295,7 @@
           <p:cNvPr id="6" name="スライド番号プレースホルダー 5">
             <a:extLst>
               <a:ext uri="{FF2B5EF4-FFF2-40B4-BE49-F238E27FC236}">
-                <a16:creationId xmlns:a16="http://schemas.microsoft.com/office/drawing/2014/main" id="{BCFD48F4-62F6-E7EF-D669-62A9A69827FB}"/>
+                <a16:creationId xmlns:a16="http://schemas.microsoft.com/office/drawing/2014/main" id="{8E8DA7E8-8236-0CD4-9BA4-02DE3AD71D0E}"/>
               </a:ext>
             </a:extLst>
           </p:cNvPr>
@@ -311,7 +311,7 @@
           <a:bodyPr/>
           <a:lstStyle/>
           <a:p>
-            <a:fld id="{9F94DCB4-02FB-43A7-A5B0-6F70E1CCE4B5}" type="slidenum">
+            <a:fld id="{5BDAC568-9787-44F3-B3F1-290E245EB885}" type="slidenum">
               <a:rPr kumimoji="1" lang="ja-JP" altLang="en-US" smtClean="0"/>
               <a:t>‹#›</a:t>
             </a:fld>
@@ -322,7 +322,7 @@
     </p:spTree>
     <p:extLst>
       <p:ext uri="{BB962C8B-B14F-4D97-AF65-F5344CB8AC3E}">
-        <p14:creationId xmlns:p14="http://schemas.microsoft.com/office/powerpoint/2010/main" val="2378162078"/>
+        <p14:creationId xmlns:p14="http://schemas.microsoft.com/office/powerpoint/2010/main" val="3043913449"/>
       </p:ext>
     </p:extLst>
   </p:cSld>
@@ -354,7 +354,7 @@
           <p:cNvPr id="2" name="タイトル 1">
             <a:extLst>
               <a:ext uri="{FF2B5EF4-FFF2-40B4-BE49-F238E27FC236}">
-                <a16:creationId xmlns:a16="http://schemas.microsoft.com/office/drawing/2014/main" id="{93F426DA-3B50-2943-872D-AE1BF2ED8755}"/>
+                <a16:creationId xmlns:a16="http://schemas.microsoft.com/office/drawing/2014/main" id="{FDFCAB5D-2F22-6A9F-6B7D-4A481A818B4F}"/>
               </a:ext>
             </a:extLst>
           </p:cNvPr>
@@ -382,7 +382,7 @@
           <p:cNvPr id="3" name="縦書きテキスト プレースホルダー 2">
             <a:extLst>
               <a:ext uri="{FF2B5EF4-FFF2-40B4-BE49-F238E27FC236}">
-                <a16:creationId xmlns:a16="http://schemas.microsoft.com/office/drawing/2014/main" id="{FEE8889A-45F5-D979-E42A-D3D87FAA2841}"/>
+                <a16:creationId xmlns:a16="http://schemas.microsoft.com/office/drawing/2014/main" id="{291665B3-E304-924B-A449-42CBEF014721}"/>
               </a:ext>
             </a:extLst>
           </p:cNvPr>
@@ -471,7 +471,7 @@
           <p:cNvPr id="4" name="日付プレースホルダー 3">
             <a:extLst>
               <a:ext uri="{FF2B5EF4-FFF2-40B4-BE49-F238E27FC236}">
-                <a16:creationId xmlns:a16="http://schemas.microsoft.com/office/drawing/2014/main" id="{C7E8D17A-A76B-8F84-C47B-FABC50F461C0}"/>
+                <a16:creationId xmlns:a16="http://schemas.microsoft.com/office/drawing/2014/main" id="{CDC35B9F-C481-F68F-99F0-38AEA9BB669B}"/>
               </a:ext>
             </a:extLst>
           </p:cNvPr>
@@ -487,7 +487,7 @@
           <a:bodyPr/>
           <a:lstStyle/>
           <a:p>
-            <a:fld id="{53E29992-8088-4498-809B-59D2E69B1D72}" type="datetimeFigureOut">
+            <a:fld id="{88781E49-F59F-4DF2-B19A-55516FFF4ED4}" type="datetimeFigureOut">
               <a:rPr kumimoji="1" lang="ja-JP" altLang="en-US" smtClean="0"/>
               <a:t>2026/7/30</a:t>
             </a:fld>
@@ -500,7 +500,7 @@
           <p:cNvPr id="5" name="フッター プレースホルダー 4">
             <a:extLst>
               <a:ext uri="{FF2B5EF4-FFF2-40B4-BE49-F238E27FC236}">
-                <a16:creationId xmlns:a16="http://schemas.microsoft.com/office/drawing/2014/main" id="{550D8B1D-246D-D954-2D47-3EEF5292F62F}"/>
+                <a16:creationId xmlns:a16="http://schemas.microsoft.com/office/drawing/2014/main" id="{E368F6FF-ADB5-02B0-A8B8-C883D063664B}"/>
               </a:ext>
             </a:extLst>
           </p:cNvPr>
@@ -525,7 +525,7 @@
           <p:cNvPr id="6" name="スライド番号プレースホルダー 5">
             <a:extLst>
               <a:ext uri="{FF2B5EF4-FFF2-40B4-BE49-F238E27FC236}">
-                <a16:creationId xmlns:a16="http://schemas.microsoft.com/office/drawing/2014/main" id="{AE6CAC6E-DCA7-58C5-4217-E5806A873BE6}"/>
+                <a16:creationId xmlns:a16="http://schemas.microsoft.com/office/drawing/2014/main" id="{81041336-8DD0-2772-44E2-946C1000E7B4}"/>
               </a:ext>
             </a:extLst>
           </p:cNvPr>
@@ -541,7 +541,7 @@
           <a:bodyPr/>
           <a:lstStyle/>
           <a:p>
-            <a:fld id="{9F94DCB4-02FB-43A7-A5B0-6F70E1CCE4B5}" type="slidenum">
+            <a:fld id="{5BDAC568-9787-44F3-B3F1-290E245EB885}" type="slidenum">
               <a:rPr kumimoji="1" lang="ja-JP" altLang="en-US" smtClean="0"/>
               <a:t>‹#›</a:t>
             </a:fld>
@@ -552,7 +552,7 @@
     </p:spTree>
     <p:extLst>
       <p:ext uri="{BB962C8B-B14F-4D97-AF65-F5344CB8AC3E}">
-        <p14:creationId xmlns:p14="http://schemas.microsoft.com/office/powerpoint/2010/main" val="361306590"/>
+        <p14:creationId xmlns:p14="http://schemas.microsoft.com/office/powerpoint/2010/main" val="1535458404"/>
       </p:ext>
     </p:extLst>
   </p:cSld>
@@ -584,7 +584,7 @@
           <p:cNvPr id="2" name="縦書きタイトル 1">
             <a:extLst>
               <a:ext uri="{FF2B5EF4-FFF2-40B4-BE49-F238E27FC236}">
-                <a16:creationId xmlns:a16="http://schemas.microsoft.com/office/drawing/2014/main" id="{88EFF027-3CE5-124A-A98B-773863533730}"/>
+                <a16:creationId xmlns:a16="http://schemas.microsoft.com/office/drawing/2014/main" id="{66ACBC85-82AA-8D36-2FF4-8C987373D3EC}"/>
               </a:ext>
             </a:extLst>
           </p:cNvPr>
@@ -617,7 +617,7 @@
           <p:cNvPr id="3" name="縦書きテキスト プレースホルダー 2">
             <a:extLst>
               <a:ext uri="{FF2B5EF4-FFF2-40B4-BE49-F238E27FC236}">
-                <a16:creationId xmlns:a16="http://schemas.microsoft.com/office/drawing/2014/main" id="{7F447E01-546C-C261-67EE-FC8D82B1DE45}"/>
+                <a16:creationId xmlns:a16="http://schemas.microsoft.com/office/drawing/2014/main" id="{756D1E6A-9DE1-EB9C-3492-86028F47FD7A}"/>
               </a:ext>
             </a:extLst>
           </p:cNvPr>
@@ -711,7 +711,7 @@
           <p:cNvPr id="4" name="日付プレースホルダー 3">
             <a:extLst>
               <a:ext uri="{FF2B5EF4-FFF2-40B4-BE49-F238E27FC236}">
-                <a16:creationId xmlns:a16="http://schemas.microsoft.com/office/drawing/2014/main" id="{4D4A1A5A-48CA-F513-6C55-75E12DC1975A}"/>
+                <a16:creationId xmlns:a16="http://schemas.microsoft.com/office/drawing/2014/main" id="{7537B04A-C7B4-872E-2C26-F9019AFD2478}"/>
               </a:ext>
             </a:extLst>
           </p:cNvPr>
@@ -727,7 +727,7 @@
           <a:bodyPr/>
           <a:lstStyle/>
           <a:p>
-            <a:fld id="{53E29992-8088-4498-809B-59D2E69B1D72}" type="datetimeFigureOut">
+            <a:fld id="{88781E49-F59F-4DF2-B19A-55516FFF4ED4}" type="datetimeFigureOut">
               <a:rPr kumimoji="1" lang="ja-JP" altLang="en-US" smtClean="0"/>
               <a:t>2026/7/30</a:t>
             </a:fld>
@@ -740,7 +740,7 @@
           <p:cNvPr id="5" name="フッター プレースホルダー 4">
             <a:extLst>
               <a:ext uri="{FF2B5EF4-FFF2-40B4-BE49-F238E27FC236}">
-                <a16:creationId xmlns:a16="http://schemas.microsoft.com/office/drawing/2014/main" id="{E2BDFC7D-7BD8-2667-8996-2472CC0F1F77}"/>
+                <a16:creationId xmlns:a16="http://schemas.microsoft.com/office/drawing/2014/main" id="{ACEEFE67-ACAA-2F83-E476-587130F7130F}"/>
               </a:ext>
             </a:extLst>
           </p:cNvPr>
@@ -765,7 +765,7 @@
           <p:cNvPr id="6" name="スライド番号プレースホルダー 5">
             <a:extLst>
               <a:ext uri="{FF2B5EF4-FFF2-40B4-BE49-F238E27FC236}">
-                <a16:creationId xmlns:a16="http://schemas.microsoft.com/office/drawing/2014/main" id="{E8B97E70-AE01-6DA1-AB61-E4FDC82AC5A5}"/>
+                <a16:creationId xmlns:a16="http://schemas.microsoft.com/office/drawing/2014/main" id="{C99244C1-E229-1B1D-1877-5FB79D8EF71C}"/>
               </a:ext>
             </a:extLst>
           </p:cNvPr>
@@ -781,7 +781,7 @@
           <a:bodyPr/>
           <a:lstStyle/>
           <a:p>
-            <a:fld id="{9F94DCB4-02FB-43A7-A5B0-6F70E1CCE4B5}" type="slidenum">
+            <a:fld id="{5BDAC568-9787-44F3-B3F1-290E245EB885}" type="slidenum">
               <a:rPr kumimoji="1" lang="ja-JP" altLang="en-US" smtClean="0"/>
               <a:t>‹#›</a:t>
             </a:fld>
@@ -792,7 +792,7 @@
     </p:spTree>
     <p:extLst>
       <p:ext uri="{BB962C8B-B14F-4D97-AF65-F5344CB8AC3E}">
-        <p14:creationId xmlns:p14="http://schemas.microsoft.com/office/powerpoint/2010/main" val="3124903045"/>
+        <p14:creationId xmlns:p14="http://schemas.microsoft.com/office/powerpoint/2010/main" val="2321507978"/>
       </p:ext>
     </p:extLst>
   </p:cSld>
@@ -824,7 +824,7 @@
           <p:cNvPr id="2" name="タイトル 1">
             <a:extLst>
               <a:ext uri="{FF2B5EF4-FFF2-40B4-BE49-F238E27FC236}">
-                <a16:creationId xmlns:a16="http://schemas.microsoft.com/office/drawing/2014/main" id="{2600F4EF-867E-81D1-47EE-A6837E617077}"/>
+                <a16:creationId xmlns:a16="http://schemas.microsoft.com/office/drawing/2014/main" id="{9200F608-73E3-3219-C577-B6CF8B179322}"/>
               </a:ext>
             </a:extLst>
           </p:cNvPr>
@@ -852,7 +852,7 @@
           <p:cNvPr id="3" name="コンテンツ プレースホルダー 2">
             <a:extLst>
               <a:ext uri="{FF2B5EF4-FFF2-40B4-BE49-F238E27FC236}">
-                <a16:creationId xmlns:a16="http://schemas.microsoft.com/office/drawing/2014/main" id="{8E3DEA83-64A2-D754-3F23-B4A860B15A45}"/>
+                <a16:creationId xmlns:a16="http://schemas.microsoft.com/office/drawing/2014/main" id="{97B51F7E-B2D4-1BC2-50F6-845F916581FA}"/>
               </a:ext>
             </a:extLst>
           </p:cNvPr>
@@ -941,7 +941,7 @@
           <p:cNvPr id="4" name="日付プレースホルダー 3">
             <a:extLst>
               <a:ext uri="{FF2B5EF4-FFF2-40B4-BE49-F238E27FC236}">
-                <a16:creationId xmlns:a16="http://schemas.microsoft.com/office/drawing/2014/main" id="{22B3DD29-786D-2D7D-C516-217F18F6C189}"/>
+                <a16:creationId xmlns:a16="http://schemas.microsoft.com/office/drawing/2014/main" id="{87A6E8CF-4CE4-3ABB-7FE3-5909352C3B12}"/>
               </a:ext>
             </a:extLst>
           </p:cNvPr>
@@ -957,7 +957,7 @@
           <a:bodyPr/>
           <a:lstStyle/>
           <a:p>
-            <a:fld id="{53E29992-8088-4498-809B-59D2E69B1D72}" type="datetimeFigureOut">
+            <a:fld id="{88781E49-F59F-4DF2-B19A-55516FFF4ED4}" type="datetimeFigureOut">
               <a:rPr kumimoji="1" lang="ja-JP" altLang="en-US" smtClean="0"/>
               <a:t>2026/7/30</a:t>
             </a:fld>
@@ -970,7 +970,7 @@
           <p:cNvPr id="5" name="フッター プレースホルダー 4">
             <a:extLst>
               <a:ext uri="{FF2B5EF4-FFF2-40B4-BE49-F238E27FC236}">
-                <a16:creationId xmlns:a16="http://schemas.microsoft.com/office/drawing/2014/main" id="{E64BEBFA-DD21-E84C-F878-CF2FB70D8AAC}"/>
+                <a16:creationId xmlns:a16="http://schemas.microsoft.com/office/drawing/2014/main" id="{F3A8516F-C141-BB8B-B17F-EA3AA59A4F2D}"/>
               </a:ext>
             </a:extLst>
           </p:cNvPr>
@@ -995,7 +995,7 @@
           <p:cNvPr id="6" name="スライド番号プレースホルダー 5">
             <a:extLst>
               <a:ext uri="{FF2B5EF4-FFF2-40B4-BE49-F238E27FC236}">
-                <a16:creationId xmlns:a16="http://schemas.microsoft.com/office/drawing/2014/main" id="{F0F0EE2C-9EF3-5EA1-12B0-033A3659D59A}"/>
+                <a16:creationId xmlns:a16="http://schemas.microsoft.com/office/drawing/2014/main" id="{7184F603-97C6-5D4F-7EEC-67DE3750A949}"/>
               </a:ext>
             </a:extLst>
           </p:cNvPr>
@@ -1011,7 +1011,7 @@
           <a:bodyPr/>
           <a:lstStyle/>
           <a:p>
-            <a:fld id="{9F94DCB4-02FB-43A7-A5B0-6F70E1CCE4B5}" type="slidenum">
+            <a:fld id="{5BDAC568-9787-44F3-B3F1-290E245EB885}" type="slidenum">
               <a:rPr kumimoji="1" lang="ja-JP" altLang="en-US" smtClean="0"/>
               <a:t>‹#›</a:t>
             </a:fld>
@@ -1022,7 +1022,7 @@
     </p:spTree>
     <p:extLst>
       <p:ext uri="{BB962C8B-B14F-4D97-AF65-F5344CB8AC3E}">
-        <p14:creationId xmlns:p14="http://schemas.microsoft.com/office/powerpoint/2010/main" val="837057611"/>
+        <p14:creationId xmlns:p14="http://schemas.microsoft.com/office/powerpoint/2010/main" val="3899892450"/>
       </p:ext>
     </p:extLst>
   </p:cSld>
@@ -1054,7 +1054,7 @@
           <p:cNvPr id="2" name="タイトル 1">
             <a:extLst>
               <a:ext uri="{FF2B5EF4-FFF2-40B4-BE49-F238E27FC236}">
-                <a16:creationId xmlns:a16="http://schemas.microsoft.com/office/drawing/2014/main" id="{64EB9B6B-B41C-CFE5-37EA-1D9ED84E904A}"/>
+                <a16:creationId xmlns:a16="http://schemas.microsoft.com/office/drawing/2014/main" id="{7AD85EAB-0E1E-17E2-F278-E724F7522F36}"/>
               </a:ext>
             </a:extLst>
           </p:cNvPr>
@@ -1091,7 +1091,7 @@
           <p:cNvPr id="3" name="テキスト プレースホルダー 2">
             <a:extLst>
               <a:ext uri="{FF2B5EF4-FFF2-40B4-BE49-F238E27FC236}">
-                <a16:creationId xmlns:a16="http://schemas.microsoft.com/office/drawing/2014/main" id="{0BD0EEDC-724F-B522-1BE1-25087B8C61A7}"/>
+                <a16:creationId xmlns:a16="http://schemas.microsoft.com/office/drawing/2014/main" id="{E21D22CB-96AB-F1AC-6EF2-99F21514B7C4}"/>
               </a:ext>
             </a:extLst>
           </p:cNvPr>
@@ -1216,7 +1216,7 @@
           <p:cNvPr id="4" name="日付プレースホルダー 3">
             <a:extLst>
               <a:ext uri="{FF2B5EF4-FFF2-40B4-BE49-F238E27FC236}">
-                <a16:creationId xmlns:a16="http://schemas.microsoft.com/office/drawing/2014/main" id="{AA39DE97-72E4-9AC8-64F6-C05E2CE83427}"/>
+                <a16:creationId xmlns:a16="http://schemas.microsoft.com/office/drawing/2014/main" id="{2A2E98B9-B83B-9884-5F78-60BF09F349CC}"/>
               </a:ext>
             </a:extLst>
           </p:cNvPr>
@@ -1232,7 +1232,7 @@
           <a:bodyPr/>
           <a:lstStyle/>
           <a:p>
-            <a:fld id="{53E29992-8088-4498-809B-59D2E69B1D72}" type="datetimeFigureOut">
+            <a:fld id="{88781E49-F59F-4DF2-B19A-55516FFF4ED4}" type="datetimeFigureOut">
               <a:rPr kumimoji="1" lang="ja-JP" altLang="en-US" smtClean="0"/>
               <a:t>2026/7/30</a:t>
             </a:fld>
@@ -1245,7 +1245,7 @@
           <p:cNvPr id="5" name="フッター プレースホルダー 4">
             <a:extLst>
               <a:ext uri="{FF2B5EF4-FFF2-40B4-BE49-F238E27FC236}">
-                <a16:creationId xmlns:a16="http://schemas.microsoft.com/office/drawing/2014/main" id="{1362570A-00AC-0278-1C94-AF7E8228BB8F}"/>
+                <a16:creationId xmlns:a16="http://schemas.microsoft.com/office/drawing/2014/main" id="{51A21B41-C50E-3178-3640-9641A3056069}"/>
               </a:ext>
             </a:extLst>
           </p:cNvPr>
@@ -1270,7 +1270,7 @@
           <p:cNvPr id="6" name="スライド番号プレースホルダー 5">
             <a:extLst>
               <a:ext uri="{FF2B5EF4-FFF2-40B4-BE49-F238E27FC236}">
-                <a16:creationId xmlns:a16="http://schemas.microsoft.com/office/drawing/2014/main" id="{4A019B18-B8B2-11EE-105A-C25AB07E91B7}"/>
+                <a16:creationId xmlns:a16="http://schemas.microsoft.com/office/drawing/2014/main" id="{5BD0BC1E-FB9F-DCCA-D305-4C7C7E78C956}"/>
               </a:ext>
             </a:extLst>
           </p:cNvPr>
@@ -1286,7 +1286,7 @@
           <a:bodyPr/>
           <a:lstStyle/>
           <a:p>
-            <a:fld id="{9F94DCB4-02FB-43A7-A5B0-6F70E1CCE4B5}" type="slidenum">
+            <a:fld id="{5BDAC568-9787-44F3-B3F1-290E245EB885}" type="slidenum">
               <a:rPr kumimoji="1" lang="ja-JP" altLang="en-US" smtClean="0"/>
               <a:t>‹#›</a:t>
             </a:fld>
@@ -1297,7 +1297,7 @@
     </p:spTree>
     <p:extLst>
       <p:ext uri="{BB962C8B-B14F-4D97-AF65-F5344CB8AC3E}">
-        <p14:creationId xmlns:p14="http://schemas.microsoft.com/office/powerpoint/2010/main" val="2520400523"/>
+        <p14:creationId xmlns:p14="http://schemas.microsoft.com/office/powerpoint/2010/main" val="2775888282"/>
       </p:ext>
     </p:extLst>
   </p:cSld>
@@ -1329,7 +1329,7 @@
           <p:cNvPr id="2" name="タイトル 1">
             <a:extLst>
               <a:ext uri="{FF2B5EF4-FFF2-40B4-BE49-F238E27FC236}">
-                <a16:creationId xmlns:a16="http://schemas.microsoft.com/office/drawing/2014/main" id="{AFDB6AFE-F773-2442-B2BD-969948B688F0}"/>
+                <a16:creationId xmlns:a16="http://schemas.microsoft.com/office/drawing/2014/main" id="{02333112-5DE3-1D39-E4A1-0038BF190535}"/>
               </a:ext>
             </a:extLst>
           </p:cNvPr>
@@ -1357,7 +1357,7 @@
           <p:cNvPr id="3" name="コンテンツ プレースホルダー 2">
             <a:extLst>
               <a:ext uri="{FF2B5EF4-FFF2-40B4-BE49-F238E27FC236}">
-                <a16:creationId xmlns:a16="http://schemas.microsoft.com/office/drawing/2014/main" id="{C36D1B0C-B2C1-8341-0FA2-4E2052AAD471}"/>
+                <a16:creationId xmlns:a16="http://schemas.microsoft.com/office/drawing/2014/main" id="{79D353EA-9C65-3852-131A-A34D2A5DC3D6}"/>
               </a:ext>
             </a:extLst>
           </p:cNvPr>
@@ -1451,7 +1451,7 @@
           <p:cNvPr id="4" name="コンテンツ プレースホルダー 3">
             <a:extLst>
               <a:ext uri="{FF2B5EF4-FFF2-40B4-BE49-F238E27FC236}">
-                <a16:creationId xmlns:a16="http://schemas.microsoft.com/office/drawing/2014/main" id="{EC8CF39D-F2A6-133D-CCFB-4639AAFB652F}"/>
+                <a16:creationId xmlns:a16="http://schemas.microsoft.com/office/drawing/2014/main" id="{1119D5E4-547A-EA2B-8280-008F700C2192}"/>
               </a:ext>
             </a:extLst>
           </p:cNvPr>
@@ -1545,7 +1545,7 @@
           <p:cNvPr id="5" name="日付プレースホルダー 4">
             <a:extLst>
               <a:ext uri="{FF2B5EF4-FFF2-40B4-BE49-F238E27FC236}">
-                <a16:creationId xmlns:a16="http://schemas.microsoft.com/office/drawing/2014/main" id="{7CECB4E8-FFC1-2AC0-3929-9A100DCCF7C1}"/>
+                <a16:creationId xmlns:a16="http://schemas.microsoft.com/office/drawing/2014/main" id="{A1D1A695-EEF3-8139-7D10-ECED4A20A1B5}"/>
               </a:ext>
             </a:extLst>
           </p:cNvPr>
@@ -1561,7 +1561,7 @@
           <a:bodyPr/>
           <a:lstStyle/>
           <a:p>
-            <a:fld id="{53E29992-8088-4498-809B-59D2E69B1D72}" type="datetimeFigureOut">
+            <a:fld id="{88781E49-F59F-4DF2-B19A-55516FFF4ED4}" type="datetimeFigureOut">
               <a:rPr kumimoji="1" lang="ja-JP" altLang="en-US" smtClean="0"/>
               <a:t>2026/7/30</a:t>
             </a:fld>
@@ -1574,7 +1574,7 @@
           <p:cNvPr id="6" name="フッター プレースホルダー 5">
             <a:extLst>
               <a:ext uri="{FF2B5EF4-FFF2-40B4-BE49-F238E27FC236}">
-                <a16:creationId xmlns:a16="http://schemas.microsoft.com/office/drawing/2014/main" id="{027DAE3E-FA12-CD03-FE51-6BB1B72016AA}"/>
+                <a16:creationId xmlns:a16="http://schemas.microsoft.com/office/drawing/2014/main" id="{1E568199-2A89-CB1A-F178-78A862267B35}"/>
               </a:ext>
             </a:extLst>
           </p:cNvPr>
@@ -1599,7 +1599,7 @@
           <p:cNvPr id="7" name="スライド番号プレースホルダー 6">
             <a:extLst>
               <a:ext uri="{FF2B5EF4-FFF2-40B4-BE49-F238E27FC236}">
-                <a16:creationId xmlns:a16="http://schemas.microsoft.com/office/drawing/2014/main" id="{FFE6A617-8236-3D36-97C0-DB69CD27F546}"/>
+                <a16:creationId xmlns:a16="http://schemas.microsoft.com/office/drawing/2014/main" id="{5F787D95-A1E4-3898-F5E5-7754CE48F11B}"/>
               </a:ext>
             </a:extLst>
           </p:cNvPr>
@@ -1615,7 +1615,7 @@
           <a:bodyPr/>
           <a:lstStyle/>
           <a:p>
-            <a:fld id="{9F94DCB4-02FB-43A7-A5B0-6F70E1CCE4B5}" type="slidenum">
+            <a:fld id="{5BDAC568-9787-44F3-B3F1-290E245EB885}" type="slidenum">
               <a:rPr kumimoji="1" lang="ja-JP" altLang="en-US" smtClean="0"/>
               <a:t>‹#›</a:t>
             </a:fld>
@@ -1626,7 +1626,7 @@
     </p:spTree>
     <p:extLst>
       <p:ext uri="{BB962C8B-B14F-4D97-AF65-F5344CB8AC3E}">
-        <p14:creationId xmlns:p14="http://schemas.microsoft.com/office/powerpoint/2010/main" val="2164935508"/>
+        <p14:creationId xmlns:p14="http://schemas.microsoft.com/office/powerpoint/2010/main" val="2211508049"/>
       </p:ext>
     </p:extLst>
   </p:cSld>
@@ -1658,7 +1658,7 @@
           <p:cNvPr id="2" name="タイトル 1">
             <a:extLst>
               <a:ext uri="{FF2B5EF4-FFF2-40B4-BE49-F238E27FC236}">
-                <a16:creationId xmlns:a16="http://schemas.microsoft.com/office/drawing/2014/main" id="{D1A1713F-1A04-C782-6B65-DC07E01E957B}"/>
+                <a16:creationId xmlns:a16="http://schemas.microsoft.com/office/drawing/2014/main" id="{6925C7FB-32DA-D6B5-AE2B-5E51BEBDCBD5}"/>
               </a:ext>
             </a:extLst>
           </p:cNvPr>
@@ -1691,7 +1691,7 @@
           <p:cNvPr id="3" name="テキスト プレースホルダー 2">
             <a:extLst>
               <a:ext uri="{FF2B5EF4-FFF2-40B4-BE49-F238E27FC236}">
-                <a16:creationId xmlns:a16="http://schemas.microsoft.com/office/drawing/2014/main" id="{4FEF2F9C-C6E1-FD00-F85C-D2EB1DCFDE64}"/>
+                <a16:creationId xmlns:a16="http://schemas.microsoft.com/office/drawing/2014/main" id="{9F2DDA94-BAF8-0AB2-6F0F-5110C591776B}"/>
               </a:ext>
             </a:extLst>
           </p:cNvPr>
@@ -1762,7 +1762,7 @@
           <p:cNvPr id="4" name="コンテンツ プレースホルダー 3">
             <a:extLst>
               <a:ext uri="{FF2B5EF4-FFF2-40B4-BE49-F238E27FC236}">
-                <a16:creationId xmlns:a16="http://schemas.microsoft.com/office/drawing/2014/main" id="{4FCE2C5C-B09B-9291-99C3-9DF966254035}"/>
+                <a16:creationId xmlns:a16="http://schemas.microsoft.com/office/drawing/2014/main" id="{67E84317-BD0B-67E7-8B2C-A9FC3E6F45A9}"/>
               </a:ext>
             </a:extLst>
           </p:cNvPr>
@@ -1856,7 +1856,7 @@
           <p:cNvPr id="5" name="テキスト プレースホルダー 4">
             <a:extLst>
               <a:ext uri="{FF2B5EF4-FFF2-40B4-BE49-F238E27FC236}">
-                <a16:creationId xmlns:a16="http://schemas.microsoft.com/office/drawing/2014/main" id="{FA6750DE-F026-84B6-E9A7-642BDE20F4B1}"/>
+                <a16:creationId xmlns:a16="http://schemas.microsoft.com/office/drawing/2014/main" id="{E22737AC-2025-06A9-DB68-7E050C5BFEB0}"/>
               </a:ext>
             </a:extLst>
           </p:cNvPr>
@@ -1927,7 +1927,7 @@
           <p:cNvPr id="6" name="コンテンツ プレースホルダー 5">
             <a:extLst>
               <a:ext uri="{FF2B5EF4-FFF2-40B4-BE49-F238E27FC236}">
-                <a16:creationId xmlns:a16="http://schemas.microsoft.com/office/drawing/2014/main" id="{39ED42D8-A239-07EA-4BBF-83DA4F5CC345}"/>
+                <a16:creationId xmlns:a16="http://schemas.microsoft.com/office/drawing/2014/main" id="{FFC8379A-6442-9324-F0E7-A47D8C577F7D}"/>
               </a:ext>
             </a:extLst>
           </p:cNvPr>
@@ -2021,7 +2021,7 @@
           <p:cNvPr id="7" name="日付プレースホルダー 6">
             <a:extLst>
               <a:ext uri="{FF2B5EF4-FFF2-40B4-BE49-F238E27FC236}">
-                <a16:creationId xmlns:a16="http://schemas.microsoft.com/office/drawing/2014/main" id="{40D73CF2-AC11-6070-BF9B-5AC0A4EEF87A}"/>
+                <a16:creationId xmlns:a16="http://schemas.microsoft.com/office/drawing/2014/main" id="{97D1A522-08CE-63AE-B330-92509D8F8184}"/>
               </a:ext>
             </a:extLst>
           </p:cNvPr>
@@ -2037,7 +2037,7 @@
           <a:bodyPr/>
           <a:lstStyle/>
           <a:p>
-            <a:fld id="{53E29992-8088-4498-809B-59D2E69B1D72}" type="datetimeFigureOut">
+            <a:fld id="{88781E49-F59F-4DF2-B19A-55516FFF4ED4}" type="datetimeFigureOut">
               <a:rPr kumimoji="1" lang="ja-JP" altLang="en-US" smtClean="0"/>
               <a:t>2026/7/30</a:t>
             </a:fld>
@@ -2050,7 +2050,7 @@
           <p:cNvPr id="8" name="フッター プレースホルダー 7">
             <a:extLst>
               <a:ext uri="{FF2B5EF4-FFF2-40B4-BE49-F238E27FC236}">
-                <a16:creationId xmlns:a16="http://schemas.microsoft.com/office/drawing/2014/main" id="{9745C0EF-BA87-D415-3AFA-79BBFD019E64}"/>
+                <a16:creationId xmlns:a16="http://schemas.microsoft.com/office/drawing/2014/main" id="{7119699A-B264-4795-47D8-EC87F88912B4}"/>
               </a:ext>
             </a:extLst>
           </p:cNvPr>
@@ -2075,7 +2075,7 @@
           <p:cNvPr id="9" name="スライド番号プレースホルダー 8">
             <a:extLst>
               <a:ext uri="{FF2B5EF4-FFF2-40B4-BE49-F238E27FC236}">
-                <a16:creationId xmlns:a16="http://schemas.microsoft.com/office/drawing/2014/main" id="{C105E9A1-FFC7-D0F3-663A-EC5F0656E5DA}"/>
+                <a16:creationId xmlns:a16="http://schemas.microsoft.com/office/drawing/2014/main" id="{D786A2CB-A1A4-8501-357B-4F39E00146BC}"/>
               </a:ext>
             </a:extLst>
           </p:cNvPr>
@@ -2091,7 +2091,7 @@
           <a:bodyPr/>
           <a:lstStyle/>
           <a:p>
-            <a:fld id="{9F94DCB4-02FB-43A7-A5B0-6F70E1CCE4B5}" type="slidenum">
+            <a:fld id="{5BDAC568-9787-44F3-B3F1-290E245EB885}" type="slidenum">
               <a:rPr kumimoji="1" lang="ja-JP" altLang="en-US" smtClean="0"/>
               <a:t>‹#›</a:t>
             </a:fld>
@@ -2102,7 +2102,7 @@
     </p:spTree>
     <p:extLst>
       <p:ext uri="{BB962C8B-B14F-4D97-AF65-F5344CB8AC3E}">
-        <p14:creationId xmlns:p14="http://schemas.microsoft.com/office/powerpoint/2010/main" val="2407330393"/>
+        <p14:creationId xmlns:p14="http://schemas.microsoft.com/office/powerpoint/2010/main" val="2923098451"/>
       </p:ext>
     </p:extLst>
   </p:cSld>
@@ -2134,7 +2134,7 @@
           <p:cNvPr id="2" name="タイトル 1">
             <a:extLst>
               <a:ext uri="{FF2B5EF4-FFF2-40B4-BE49-F238E27FC236}">
-                <a16:creationId xmlns:a16="http://schemas.microsoft.com/office/drawing/2014/main" id="{453394C6-6E4A-C81E-01DD-5F65F5FDAF82}"/>
+                <a16:creationId xmlns:a16="http://schemas.microsoft.com/office/drawing/2014/main" id="{37623A3F-6752-7AB1-DB0A-AD0A5D9F63AC}"/>
               </a:ext>
             </a:extLst>
           </p:cNvPr>
@@ -2162,7 +2162,7 @@
           <p:cNvPr id="3" name="日付プレースホルダー 2">
             <a:extLst>
               <a:ext uri="{FF2B5EF4-FFF2-40B4-BE49-F238E27FC236}">
-                <a16:creationId xmlns:a16="http://schemas.microsoft.com/office/drawing/2014/main" id="{BD86A715-0DFA-D4D4-DB34-6B1EDDD4601D}"/>
+                <a16:creationId xmlns:a16="http://schemas.microsoft.com/office/drawing/2014/main" id="{CA35A42B-E87D-8E15-A490-C32E81D3AC7F}"/>
               </a:ext>
             </a:extLst>
           </p:cNvPr>
@@ -2178,7 +2178,7 @@
           <a:bodyPr/>
           <a:lstStyle/>
           <a:p>
-            <a:fld id="{53E29992-8088-4498-809B-59D2E69B1D72}" type="datetimeFigureOut">
+            <a:fld id="{88781E49-F59F-4DF2-B19A-55516FFF4ED4}" type="datetimeFigureOut">
               <a:rPr kumimoji="1" lang="ja-JP" altLang="en-US" smtClean="0"/>
               <a:t>2026/7/30</a:t>
             </a:fld>
@@ -2191,7 +2191,7 @@
           <p:cNvPr id="4" name="フッター プレースホルダー 3">
             <a:extLst>
               <a:ext uri="{FF2B5EF4-FFF2-40B4-BE49-F238E27FC236}">
-                <a16:creationId xmlns:a16="http://schemas.microsoft.com/office/drawing/2014/main" id="{84639A49-9D71-B6A8-20D0-D0B5EBDE3651}"/>
+                <a16:creationId xmlns:a16="http://schemas.microsoft.com/office/drawing/2014/main" id="{B800024E-35CF-8789-8632-AD98DE8C0111}"/>
               </a:ext>
             </a:extLst>
           </p:cNvPr>
@@ -2216,7 +2216,7 @@
           <p:cNvPr id="5" name="スライド番号プレースホルダー 4">
             <a:extLst>
               <a:ext uri="{FF2B5EF4-FFF2-40B4-BE49-F238E27FC236}">
-                <a16:creationId xmlns:a16="http://schemas.microsoft.com/office/drawing/2014/main" id="{E54E8D83-FCE7-0E4A-EB4E-E279FD92430A}"/>
+                <a16:creationId xmlns:a16="http://schemas.microsoft.com/office/drawing/2014/main" id="{0AF0A8CF-AFA3-0328-7377-3238AEF72512}"/>
               </a:ext>
             </a:extLst>
           </p:cNvPr>
@@ -2232,7 +2232,7 @@
           <a:bodyPr/>
           <a:lstStyle/>
           <a:p>
-            <a:fld id="{9F94DCB4-02FB-43A7-A5B0-6F70E1CCE4B5}" type="slidenum">
+            <a:fld id="{5BDAC568-9787-44F3-B3F1-290E245EB885}" type="slidenum">
               <a:rPr kumimoji="1" lang="ja-JP" altLang="en-US" smtClean="0"/>
               <a:t>‹#›</a:t>
             </a:fld>
@@ -2243,7 +2243,7 @@
     </p:spTree>
     <p:extLst>
       <p:ext uri="{BB962C8B-B14F-4D97-AF65-F5344CB8AC3E}">
-        <p14:creationId xmlns:p14="http://schemas.microsoft.com/office/powerpoint/2010/main" val="1020433870"/>
+        <p14:creationId xmlns:p14="http://schemas.microsoft.com/office/powerpoint/2010/main" val="2257146687"/>
       </p:ext>
     </p:extLst>
   </p:cSld>
@@ -2275,7 +2275,7 @@
           <p:cNvPr id="2" name="日付プレースホルダー 1">
             <a:extLst>
               <a:ext uri="{FF2B5EF4-FFF2-40B4-BE49-F238E27FC236}">
-                <a16:creationId xmlns:a16="http://schemas.microsoft.com/office/drawing/2014/main" id="{8C77CC57-8036-6A57-0758-F54C61CAF9CD}"/>
+                <a16:creationId xmlns:a16="http://schemas.microsoft.com/office/drawing/2014/main" id="{093B08D2-2124-296D-3E11-44AEC829BBC1}"/>
               </a:ext>
             </a:extLst>
           </p:cNvPr>
@@ -2291,7 +2291,7 @@
           <a:bodyPr/>
           <a:lstStyle/>
           <a:p>
-            <a:fld id="{53E29992-8088-4498-809B-59D2E69B1D72}" type="datetimeFigureOut">
+            <a:fld id="{88781E49-F59F-4DF2-B19A-55516FFF4ED4}" type="datetimeFigureOut">
               <a:rPr kumimoji="1" lang="ja-JP" altLang="en-US" smtClean="0"/>
               <a:t>2026/7/30</a:t>
             </a:fld>
@@ -2304,7 +2304,7 @@
           <p:cNvPr id="3" name="フッター プレースホルダー 2">
             <a:extLst>
               <a:ext uri="{FF2B5EF4-FFF2-40B4-BE49-F238E27FC236}">
-                <a16:creationId xmlns:a16="http://schemas.microsoft.com/office/drawing/2014/main" id="{EF286787-4761-9F4A-5AE4-5E8273A24DA7}"/>
+                <a16:creationId xmlns:a16="http://schemas.microsoft.com/office/drawing/2014/main" id="{57DD0F6B-FC5E-D57B-7284-7C891AAC6386}"/>
               </a:ext>
             </a:extLst>
           </p:cNvPr>
@@ -2329,7 +2329,7 @@
           <p:cNvPr id="4" name="スライド番号プレースホルダー 3">
             <a:extLst>
               <a:ext uri="{FF2B5EF4-FFF2-40B4-BE49-F238E27FC236}">
-                <a16:creationId xmlns:a16="http://schemas.microsoft.com/office/drawing/2014/main" id="{98674683-B1D5-B174-0C18-C980D0F3BCD6}"/>
+                <a16:creationId xmlns:a16="http://schemas.microsoft.com/office/drawing/2014/main" id="{B5C8DAC6-8415-E7C1-F72A-304462FD2528}"/>
               </a:ext>
             </a:extLst>
           </p:cNvPr>
@@ -2345,7 +2345,7 @@
           <a:bodyPr/>
           <a:lstStyle/>
           <a:p>
-            <a:fld id="{9F94DCB4-02FB-43A7-A5B0-6F70E1CCE4B5}" type="slidenum">
+            <a:fld id="{5BDAC568-9787-44F3-B3F1-290E245EB885}" type="slidenum">
               <a:rPr kumimoji="1" lang="ja-JP" altLang="en-US" smtClean="0"/>
               <a:t>‹#›</a:t>
             </a:fld>
@@ -2356,7 +2356,7 @@
     </p:spTree>
     <p:extLst>
       <p:ext uri="{BB962C8B-B14F-4D97-AF65-F5344CB8AC3E}">
-        <p14:creationId xmlns:p14="http://schemas.microsoft.com/office/powerpoint/2010/main" val="498512025"/>
+        <p14:creationId xmlns:p14="http://schemas.microsoft.com/office/powerpoint/2010/main" val="4133229669"/>
       </p:ext>
     </p:extLst>
   </p:cSld>
@@ -2388,7 +2388,7 @@
           <p:cNvPr id="2" name="タイトル 1">
             <a:extLst>
               <a:ext uri="{FF2B5EF4-FFF2-40B4-BE49-F238E27FC236}">
-                <a16:creationId xmlns:a16="http://schemas.microsoft.com/office/drawing/2014/main" id="{A5339C4C-3D30-957C-84E0-1465517E8A52}"/>
+                <a16:creationId xmlns:a16="http://schemas.microsoft.com/office/drawing/2014/main" id="{3F5F527B-F0A4-1441-6FE5-2C03CFB95463}"/>
               </a:ext>
             </a:extLst>
           </p:cNvPr>
@@ -2425,7 +2425,7 @@
           <p:cNvPr id="3" name="コンテンツ プレースホルダー 2">
             <a:extLst>
               <a:ext uri="{FF2B5EF4-FFF2-40B4-BE49-F238E27FC236}">
-                <a16:creationId xmlns:a16="http://schemas.microsoft.com/office/drawing/2014/main" id="{718620EF-7745-1C16-D028-1B39EB0A2830}"/>
+                <a16:creationId xmlns:a16="http://schemas.microsoft.com/office/drawing/2014/main" id="{02359A49-8221-6A9B-96C7-3C51F5F17B13}"/>
               </a:ext>
             </a:extLst>
           </p:cNvPr>
@@ -2547,7 +2547,7 @@
           <p:cNvPr id="4" name="テキスト プレースホルダー 3">
             <a:extLst>
               <a:ext uri="{FF2B5EF4-FFF2-40B4-BE49-F238E27FC236}">
-                <a16:creationId xmlns:a16="http://schemas.microsoft.com/office/drawing/2014/main" id="{3C61649A-43C5-ED3A-E3BA-AE9561B2FC5D}"/>
+                <a16:creationId xmlns:a16="http://schemas.microsoft.com/office/drawing/2014/main" id="{E2DFA49F-976A-0D52-8A0B-F8BACC11332A}"/>
               </a:ext>
             </a:extLst>
           </p:cNvPr>
@@ -2618,7 +2618,7 @@
           <p:cNvPr id="5" name="日付プレースホルダー 4">
             <a:extLst>
               <a:ext uri="{FF2B5EF4-FFF2-40B4-BE49-F238E27FC236}">
-                <a16:creationId xmlns:a16="http://schemas.microsoft.com/office/drawing/2014/main" id="{246DAD26-D904-E336-09FB-5B12AF64EED7}"/>
+                <a16:creationId xmlns:a16="http://schemas.microsoft.com/office/drawing/2014/main" id="{3AF9EDB9-CF48-6E9B-A2DE-FDFBD7A96B0C}"/>
               </a:ext>
             </a:extLst>
           </p:cNvPr>
@@ -2634,7 +2634,7 @@
           <a:bodyPr/>
           <a:lstStyle/>
           <a:p>
-            <a:fld id="{53E29992-8088-4498-809B-59D2E69B1D72}" type="datetimeFigureOut">
+            <a:fld id="{88781E49-F59F-4DF2-B19A-55516FFF4ED4}" type="datetimeFigureOut">
               <a:rPr kumimoji="1" lang="ja-JP" altLang="en-US" smtClean="0"/>
               <a:t>2026/7/30</a:t>
             </a:fld>
@@ -2647,7 +2647,7 @@
           <p:cNvPr id="6" name="フッター プレースホルダー 5">
             <a:extLst>
               <a:ext uri="{FF2B5EF4-FFF2-40B4-BE49-F238E27FC236}">
-                <a16:creationId xmlns:a16="http://schemas.microsoft.com/office/drawing/2014/main" id="{76A573D8-9406-3F9B-23E4-979B2A4AD07A}"/>
+                <a16:creationId xmlns:a16="http://schemas.microsoft.com/office/drawing/2014/main" id="{9C9FF792-71BF-A971-8956-09DC1EEC1878}"/>
               </a:ext>
             </a:extLst>
           </p:cNvPr>
@@ -2672,7 +2672,7 @@
           <p:cNvPr id="7" name="スライド番号プレースホルダー 6">
             <a:extLst>
               <a:ext uri="{FF2B5EF4-FFF2-40B4-BE49-F238E27FC236}">
-                <a16:creationId xmlns:a16="http://schemas.microsoft.com/office/drawing/2014/main" id="{47F000D4-7167-4030-0507-18B169A5F79B}"/>
+                <a16:creationId xmlns:a16="http://schemas.microsoft.com/office/drawing/2014/main" id="{F6328033-75DE-DC31-D7CD-BECD4544B3FA}"/>
               </a:ext>
             </a:extLst>
           </p:cNvPr>
@@ -2688,7 +2688,7 @@
           <a:bodyPr/>
           <a:lstStyle/>
           <a:p>
-            <a:fld id="{9F94DCB4-02FB-43A7-A5B0-6F70E1CCE4B5}" type="slidenum">
+            <a:fld id="{5BDAC568-9787-44F3-B3F1-290E245EB885}" type="slidenum">
               <a:rPr kumimoji="1" lang="ja-JP" altLang="en-US" smtClean="0"/>
               <a:t>‹#›</a:t>
             </a:fld>
@@ -2699,7 +2699,7 @@
     </p:spTree>
     <p:extLst>
       <p:ext uri="{BB962C8B-B14F-4D97-AF65-F5344CB8AC3E}">
-        <p14:creationId xmlns:p14="http://schemas.microsoft.com/office/powerpoint/2010/main" val="239635235"/>
+        <p14:creationId xmlns:p14="http://schemas.microsoft.com/office/powerpoint/2010/main" val="4017655508"/>
       </p:ext>
     </p:extLst>
   </p:cSld>
@@ -2731,7 +2731,7 @@
           <p:cNvPr id="2" name="タイトル 1">
             <a:extLst>
               <a:ext uri="{FF2B5EF4-FFF2-40B4-BE49-F238E27FC236}">
-                <a16:creationId xmlns:a16="http://schemas.microsoft.com/office/drawing/2014/main" id="{28BA255C-B476-DA60-AF88-ABEB636615F5}"/>
+                <a16:creationId xmlns:a16="http://schemas.microsoft.com/office/drawing/2014/main" id="{9D2954E2-97AB-8BC3-7FE1-CC2ACD892061}"/>
               </a:ext>
             </a:extLst>
           </p:cNvPr>
@@ -2768,7 +2768,7 @@
           <p:cNvPr id="3" name="図プレースホルダー 2">
             <a:extLst>
               <a:ext uri="{FF2B5EF4-FFF2-40B4-BE49-F238E27FC236}">
-                <a16:creationId xmlns:a16="http://schemas.microsoft.com/office/drawing/2014/main" id="{971D98D8-37A4-594A-D201-CDCC914FF4DF}"/>
+                <a16:creationId xmlns:a16="http://schemas.microsoft.com/office/drawing/2014/main" id="{D5F8DDF5-20B4-5F36-9818-7C731C598831}"/>
               </a:ext>
             </a:extLst>
           </p:cNvPr>
@@ -2835,7 +2835,7 @@
           <p:cNvPr id="4" name="テキスト プレースホルダー 3">
             <a:extLst>
               <a:ext uri="{FF2B5EF4-FFF2-40B4-BE49-F238E27FC236}">
-                <a16:creationId xmlns:a16="http://schemas.microsoft.com/office/drawing/2014/main" id="{F309C6F1-1494-9892-C634-72F213FF88FD}"/>
+                <a16:creationId xmlns:a16="http://schemas.microsoft.com/office/drawing/2014/main" id="{6B86B507-B96A-8548-3D4D-27C988FE85F4}"/>
               </a:ext>
             </a:extLst>
           </p:cNvPr>
@@ -2906,7 +2906,7 @@
           <p:cNvPr id="5" name="日付プレースホルダー 4">
             <a:extLst>
               <a:ext uri="{FF2B5EF4-FFF2-40B4-BE49-F238E27FC236}">
-                <a16:creationId xmlns:a16="http://schemas.microsoft.com/office/drawing/2014/main" id="{00EDA2FF-2130-2429-0FD8-D49EC4D28A61}"/>
+                <a16:creationId xmlns:a16="http://schemas.microsoft.com/office/drawing/2014/main" id="{7A59FC9B-185E-E5A1-B3E6-96B1191ADAE1}"/>
               </a:ext>
             </a:extLst>
           </p:cNvPr>
@@ -2922,7 +2922,7 @@
           <a:bodyPr/>
           <a:lstStyle/>
           <a:p>
-            <a:fld id="{53E29992-8088-4498-809B-59D2E69B1D72}" type="datetimeFigureOut">
+            <a:fld id="{88781E49-F59F-4DF2-B19A-55516FFF4ED4}" type="datetimeFigureOut">
               <a:rPr kumimoji="1" lang="ja-JP" altLang="en-US" smtClean="0"/>
               <a:t>2026/7/30</a:t>
             </a:fld>
@@ -2935,7 +2935,7 @@
           <p:cNvPr id="6" name="フッター プレースホルダー 5">
             <a:extLst>
               <a:ext uri="{FF2B5EF4-FFF2-40B4-BE49-F238E27FC236}">
-                <a16:creationId xmlns:a16="http://schemas.microsoft.com/office/drawing/2014/main" id="{6C6CE812-1206-5AFF-27B3-1AB8A3BEAD6C}"/>
+                <a16:creationId xmlns:a16="http://schemas.microsoft.com/office/drawing/2014/main" id="{ED7356E2-312F-0D37-2930-159A498FBF84}"/>
               </a:ext>
             </a:extLst>
           </p:cNvPr>
@@ -2960,7 +2960,7 @@
           <p:cNvPr id="7" name="スライド番号プレースホルダー 6">
             <a:extLst>
               <a:ext uri="{FF2B5EF4-FFF2-40B4-BE49-F238E27FC236}">
-                <a16:creationId xmlns:a16="http://schemas.microsoft.com/office/drawing/2014/main" id="{074F86C7-C1E8-EEB3-4F70-B4721B0B2BCF}"/>
+                <a16:creationId xmlns:a16="http://schemas.microsoft.com/office/drawing/2014/main" id="{9FC6BAF5-6154-FB95-1C03-24DFA97A4EFE}"/>
               </a:ext>
             </a:extLst>
           </p:cNvPr>
@@ -2976,7 +2976,7 @@
           <a:bodyPr/>
           <a:lstStyle/>
           <a:p>
-            <a:fld id="{9F94DCB4-02FB-43A7-A5B0-6F70E1CCE4B5}" type="slidenum">
+            <a:fld id="{5BDAC568-9787-44F3-B3F1-290E245EB885}" type="slidenum">
               <a:rPr kumimoji="1" lang="ja-JP" altLang="en-US" smtClean="0"/>
               <a:t>‹#›</a:t>
             </a:fld>
@@ -2987,7 +2987,7 @@
     </p:spTree>
     <p:extLst>
       <p:ext uri="{BB962C8B-B14F-4D97-AF65-F5344CB8AC3E}">
-        <p14:creationId xmlns:p14="http://schemas.microsoft.com/office/powerpoint/2010/main" val="998963853"/>
+        <p14:creationId xmlns:p14="http://schemas.microsoft.com/office/powerpoint/2010/main" val="3292491093"/>
       </p:ext>
     </p:extLst>
   </p:cSld>
@@ -3024,7 +3024,7 @@
           <p:cNvPr id="2" name="タイトル プレースホルダー 1">
             <a:extLst>
               <a:ext uri="{FF2B5EF4-FFF2-40B4-BE49-F238E27FC236}">
-                <a16:creationId xmlns:a16="http://schemas.microsoft.com/office/drawing/2014/main" id="{FC89C16D-FA86-E07C-F6BD-86F9C284AB91}"/>
+                <a16:creationId xmlns:a16="http://schemas.microsoft.com/office/drawing/2014/main" id="{23427590-F38B-0EB7-882B-050BBD103443}"/>
               </a:ext>
             </a:extLst>
           </p:cNvPr>
@@ -3062,7 +3062,7 @@
           <p:cNvPr id="3" name="テキスト プレースホルダー 2">
             <a:extLst>
               <a:ext uri="{FF2B5EF4-FFF2-40B4-BE49-F238E27FC236}">
-                <a16:creationId xmlns:a16="http://schemas.microsoft.com/office/drawing/2014/main" id="{776B7F3C-DB71-8520-0630-41E4C4527BB7}"/>
+                <a16:creationId xmlns:a16="http://schemas.microsoft.com/office/drawing/2014/main" id="{6E86CE18-FB6B-5476-871C-9BB1B53B29D6}"/>
               </a:ext>
             </a:extLst>
           </p:cNvPr>
@@ -3161,7 +3161,7 @@
           <p:cNvPr id="4" name="日付プレースホルダー 3">
             <a:extLst>
               <a:ext uri="{FF2B5EF4-FFF2-40B4-BE49-F238E27FC236}">
-                <a16:creationId xmlns:a16="http://schemas.microsoft.com/office/drawing/2014/main" id="{EC6C4564-332D-15F6-74E3-115AB6AAF9A3}"/>
+                <a16:creationId xmlns:a16="http://schemas.microsoft.com/office/drawing/2014/main" id="{78DC1131-00A1-1CC4-78AC-8959F17BABD0}"/>
               </a:ext>
             </a:extLst>
           </p:cNvPr>
@@ -3195,7 +3195,7 @@
             </a:lvl1pPr>
           </a:lstStyle>
           <a:p>
-            <a:fld id="{53E29992-8088-4498-809B-59D2E69B1D72}" type="datetimeFigureOut">
+            <a:fld id="{88781E49-F59F-4DF2-B19A-55516FFF4ED4}" type="datetimeFigureOut">
               <a:rPr kumimoji="1" lang="ja-JP" altLang="en-US" smtClean="0"/>
               <a:t>2026/7/30</a:t>
             </a:fld>
@@ -3208,7 +3208,7 @@
           <p:cNvPr id="5" name="フッター プレースホルダー 4">
             <a:extLst>
               <a:ext uri="{FF2B5EF4-FFF2-40B4-BE49-F238E27FC236}">
-                <a16:creationId xmlns:a16="http://schemas.microsoft.com/office/drawing/2014/main" id="{14BE50B0-953C-3CBF-EE68-729F83D7AF16}"/>
+                <a16:creationId xmlns:a16="http://schemas.microsoft.com/office/drawing/2014/main" id="{888B4CC6-B68E-C847-06AB-3BD2EF54045F}"/>
               </a:ext>
             </a:extLst>
           </p:cNvPr>
@@ -3251,7 +3251,7 @@
           <p:cNvPr id="6" name="スライド番号プレースホルダー 5">
             <a:extLst>
               <a:ext uri="{FF2B5EF4-FFF2-40B4-BE49-F238E27FC236}">
-                <a16:creationId xmlns:a16="http://schemas.microsoft.com/office/drawing/2014/main" id="{8A41671D-249A-1280-692C-0A262E47BDF6}"/>
+                <a16:creationId xmlns:a16="http://schemas.microsoft.com/office/drawing/2014/main" id="{2EE38427-9BAC-A89C-CEEB-D15E27379A3E}"/>
               </a:ext>
             </a:extLst>
           </p:cNvPr>
@@ -3285,7 +3285,7 @@
             </a:lvl1pPr>
           </a:lstStyle>
           <a:p>
-            <a:fld id="{9F94DCB4-02FB-43A7-A5B0-6F70E1CCE4B5}" type="slidenum">
+            <a:fld id="{5BDAC568-9787-44F3-B3F1-290E245EB885}" type="slidenum">
               <a:rPr kumimoji="1" lang="ja-JP" altLang="en-US" smtClean="0"/>
               <a:t>‹#›</a:t>
             </a:fld>
@@ -3296,7 +3296,7 @@
     </p:spTree>
     <p:extLst>
       <p:ext uri="{BB962C8B-B14F-4D97-AF65-F5344CB8AC3E}">
-        <p14:creationId xmlns:p14="http://schemas.microsoft.com/office/powerpoint/2010/main" val="1316591218"/>
+        <p14:creationId xmlns:p14="http://schemas.microsoft.com/office/powerpoint/2010/main" val="4278688167"/>
       </p:ext>
     </p:extLst>
   </p:cSld>
@@ -3619,7 +3619,7 @@
           <p:cNvPr id="2" name="テキスト ボックス 1">
             <a:extLst>
               <a:ext uri="{FF2B5EF4-FFF2-40B4-BE49-F238E27FC236}">
-                <a16:creationId xmlns:a16="http://schemas.microsoft.com/office/drawing/2014/main" id="{2DAA775A-A4B7-C725-7566-49D31F53486F}"/>
+                <a16:creationId xmlns:a16="http://schemas.microsoft.com/office/drawing/2014/main" id="{9F3F1103-161C-11C3-CFE8-019C1A8B457F}"/>
               </a:ext>
             </a:extLst>
           </p:cNvPr>
@@ -3665,7 +3665,7 @@
           <p:cNvPr id="3" name="テキスト ボックス 2">
             <a:extLst>
               <a:ext uri="{FF2B5EF4-FFF2-40B4-BE49-F238E27FC236}">
-                <a16:creationId xmlns:a16="http://schemas.microsoft.com/office/drawing/2014/main" id="{A94C343A-13E3-81FE-4E70-FE351C19F8C2}"/>
+                <a16:creationId xmlns:a16="http://schemas.microsoft.com/office/drawing/2014/main" id="{0A2C773A-0B12-D989-CEFA-A379084F874C}"/>
               </a:ext>
             </a:extLst>
           </p:cNvPr>
@@ -3714,7 +3714,7 @@
           <p:cNvPr id="4" name="テキスト ボックス 3">
             <a:extLst>
               <a:ext uri="{FF2B5EF4-FFF2-40B4-BE49-F238E27FC236}">
-                <a16:creationId xmlns:a16="http://schemas.microsoft.com/office/drawing/2014/main" id="{528A6E88-9E7C-22BE-4E14-B5810F95EE36}"/>
+                <a16:creationId xmlns:a16="http://schemas.microsoft.com/office/drawing/2014/main" id="{07BBDD44-BF54-1481-76C5-68883748F933}"/>
               </a:ext>
             </a:extLst>
           </p:cNvPr>
@@ -3754,7 +3754,7 @@
           <p:cNvPr id="5" name="テキスト ボックス 4">
             <a:extLst>
               <a:ext uri="{FF2B5EF4-FFF2-40B4-BE49-F238E27FC236}">
-                <a16:creationId xmlns:a16="http://schemas.microsoft.com/office/drawing/2014/main" id="{F50B523A-0C32-EACF-2F0E-399F5429F022}"/>
+                <a16:creationId xmlns:a16="http://schemas.microsoft.com/office/drawing/2014/main" id="{F724B16D-FAEF-A8A2-A09A-480FA59022BC}"/>
               </a:ext>
             </a:extLst>
           </p:cNvPr>
@@ -3801,7 +3801,7 @@
             <a:hlinkClick r:id="" action="ppaction://media"/>
             <a:extLst>
               <a:ext uri="{FF2B5EF4-FFF2-40B4-BE49-F238E27FC236}">
-                <a16:creationId xmlns:a16="http://schemas.microsoft.com/office/drawing/2014/main" id="{477AA734-0BAD-279C-A5E5-F1CF0B1B456A}"/>
+                <a16:creationId xmlns:a16="http://schemas.microsoft.com/office/drawing/2014/main" id="{4C5A53A3-18DF-3117-5962-9E9DBC61BCC6}"/>
               </a:ext>
             </a:extLst>
           </p:cNvPr>
@@ -3836,7 +3836,7 @@
     </p:spTree>
     <p:extLst>
       <p:ext uri="{BB962C8B-B14F-4D97-AF65-F5344CB8AC3E}">
-        <p14:creationId xmlns:p14="http://schemas.microsoft.com/office/powerpoint/2010/main" val="74994323"/>
+        <p14:creationId xmlns:p14="http://schemas.microsoft.com/office/powerpoint/2010/main" val="3843006869"/>
       </p:ext>
     </p:extLst>
   </p:cSld>
@@ -3960,7 +3960,7 @@
           <p:cNvPr id="2" name="テキスト ボックス 1">
             <a:extLst>
               <a:ext uri="{FF2B5EF4-FFF2-40B4-BE49-F238E27FC236}">
-                <a16:creationId xmlns:a16="http://schemas.microsoft.com/office/drawing/2014/main" id="{490614DB-C900-B0C6-FA11-DDF69F99CA90}"/>
+                <a16:creationId xmlns:a16="http://schemas.microsoft.com/office/drawing/2014/main" id="{4095046F-46B8-7EF6-C665-EE80B29FB177}"/>
               </a:ext>
             </a:extLst>
           </p:cNvPr>
@@ -4006,7 +4006,7 @@
           <p:cNvPr id="3" name="テキスト ボックス 2">
             <a:extLst>
               <a:ext uri="{FF2B5EF4-FFF2-40B4-BE49-F238E27FC236}">
-                <a16:creationId xmlns:a16="http://schemas.microsoft.com/office/drawing/2014/main" id="{A3985236-D783-42E3-135A-979845913900}"/>
+                <a16:creationId xmlns:a16="http://schemas.microsoft.com/office/drawing/2014/main" id="{3FCE97CC-9626-F4D3-F65A-01A12FB17603}"/>
               </a:ext>
             </a:extLst>
           </p:cNvPr>
@@ -4046,7 +4046,7 @@
           <p:cNvPr id="4" name="テキスト ボックス 3">
             <a:extLst>
               <a:ext uri="{FF2B5EF4-FFF2-40B4-BE49-F238E27FC236}">
-                <a16:creationId xmlns:a16="http://schemas.microsoft.com/office/drawing/2014/main" id="{CFF0551B-F2C0-847B-5ABC-4FB04559DF2D}"/>
+                <a16:creationId xmlns:a16="http://schemas.microsoft.com/office/drawing/2014/main" id="{4B9066A6-FC8E-CE11-C044-7A2981077C0E}"/>
               </a:ext>
             </a:extLst>
           </p:cNvPr>
@@ -4076,14 +4076,17 @@
                 </a:solidFill>
                 <a:latin typeface="Arial" panose="020B0604020202020204" pitchFamily="34" charset="0"/>
               </a:rPr>
-              <a:t>About Laravel Laravel is a web application framework with expressive, elegant syntax</a:t>
-            </a:r>
-            <a:endParaRPr kumimoji="1" lang="ja-JP" altLang="en-US" sz="2000">
-              <a:solidFill>
-                <a:srgbClr val="333333"/>
-              </a:solidFill>
-              <a:latin typeface="Arial" panose="020B0604020202020204" pitchFamily="34" charset="0"/>
-            </a:endParaRPr>
+              <a:t>Itshikaku Shindan</a:t>
+            </a:r>
+            <a:r>
+              <a:rPr kumimoji="1" lang="ja-JP" altLang="en-US" sz="2000">
+                <a:solidFill>
+                  <a:srgbClr val="333333"/>
+                </a:solidFill>
+                <a:latin typeface="Arial" panose="020B0604020202020204" pitchFamily="34" charset="0"/>
+              </a:rPr>
+              <a:t>の目的、構成、実装を公開コードから確認できるプロジェクトです。</a:t>
+            </a:r>
           </a:p>
         </p:txBody>
       </p:sp>
@@ -4092,7 +4095,7 @@
           <p:cNvPr id="5" name="テキスト ボックス 4">
             <a:extLst>
               <a:ext uri="{FF2B5EF4-FFF2-40B4-BE49-F238E27FC236}">
-                <a16:creationId xmlns:a16="http://schemas.microsoft.com/office/drawing/2014/main" id="{56D3EA3D-B0AC-EEBE-DD6C-761545A3EB2B}"/>
+                <a16:creationId xmlns:a16="http://schemas.microsoft.com/office/drawing/2014/main" id="{2E086BB6-91FE-253D-1557-BC5EAA8079FA}"/>
               </a:ext>
             </a:extLst>
           </p:cNvPr>
@@ -4139,7 +4142,7 @@
             <a:hlinkClick r:id="" action="ppaction://media"/>
             <a:extLst>
               <a:ext uri="{FF2B5EF4-FFF2-40B4-BE49-F238E27FC236}">
-                <a16:creationId xmlns:a16="http://schemas.microsoft.com/office/drawing/2014/main" id="{8F7B6444-E127-7A18-1BB1-752D1F234D3E}"/>
+                <a16:creationId xmlns:a16="http://schemas.microsoft.com/office/drawing/2014/main" id="{78EAF4FC-DE0E-C897-79D8-CB5EE3E41264}"/>
               </a:ext>
             </a:extLst>
           </p:cNvPr>
@@ -4174,7 +4177,7 @@
     </p:spTree>
     <p:extLst>
       <p:ext uri="{BB962C8B-B14F-4D97-AF65-F5344CB8AC3E}">
-        <p14:creationId xmlns:p14="http://schemas.microsoft.com/office/powerpoint/2010/main" val="1695296265"/>
+        <p14:creationId xmlns:p14="http://schemas.microsoft.com/office/powerpoint/2010/main" val="4222378231"/>
       </p:ext>
     </p:extLst>
   </p:cSld>
@@ -4217,7 +4220,7 @@
                                   <p:childTnLst>
                                     <p:cmd type="call" cmd="playFrom(0.0)">
                                       <p:cBhvr>
-                                        <p:cTn id="6" dur="7780" fill="hold"/>
+                                        <p:cTn id="6" dur="7271" fill="hold"/>
                                         <p:tgtEl>
                                           <p:spTgt spid="6"/>
                                         </p:tgtEl>
@@ -4298,7 +4301,7 @@
           <p:cNvPr id="2" name="テキスト ボックス 1">
             <a:extLst>
               <a:ext uri="{FF2B5EF4-FFF2-40B4-BE49-F238E27FC236}">
-                <a16:creationId xmlns:a16="http://schemas.microsoft.com/office/drawing/2014/main" id="{04BE5EC7-0CF0-D7A1-5EF1-4BF85EA41C48}"/>
+                <a16:creationId xmlns:a16="http://schemas.microsoft.com/office/drawing/2014/main" id="{4D9F5B95-460E-2163-F12B-E97EFA5D1866}"/>
               </a:ext>
             </a:extLst>
           </p:cNvPr>
@@ -4344,7 +4347,7 @@
           <p:cNvPr id="3" name="テキスト ボックス 2">
             <a:extLst>
               <a:ext uri="{FF2B5EF4-FFF2-40B4-BE49-F238E27FC236}">
-                <a16:creationId xmlns:a16="http://schemas.microsoft.com/office/drawing/2014/main" id="{214A467D-BE10-C56E-9412-0B35C2C9D3C8}"/>
+                <a16:creationId xmlns:a16="http://schemas.microsoft.com/office/drawing/2014/main" id="{8CD140FD-8F4A-0547-94E4-1E93376556A3}"/>
               </a:ext>
             </a:extLst>
           </p:cNvPr>
@@ -4384,7 +4387,7 @@
           <p:cNvPr id="4" name="テキスト ボックス 3">
             <a:extLst>
               <a:ext uri="{FF2B5EF4-FFF2-40B4-BE49-F238E27FC236}">
-                <a16:creationId xmlns:a16="http://schemas.microsoft.com/office/drawing/2014/main" id="{AE6FA20D-7384-FF03-5CEF-348665600883}"/>
+                <a16:creationId xmlns:a16="http://schemas.microsoft.com/office/drawing/2014/main" id="{7CF36307-0AFE-84DD-7723-CA190B7DCABB}"/>
               </a:ext>
             </a:extLst>
           </p:cNvPr>
@@ -4515,7 +4518,7 @@
           <p:cNvPr id="5" name="テキスト ボックス 4">
             <a:extLst>
               <a:ext uri="{FF2B5EF4-FFF2-40B4-BE49-F238E27FC236}">
-                <a16:creationId xmlns:a16="http://schemas.microsoft.com/office/drawing/2014/main" id="{72ACE079-48F1-740B-31C2-7223F18AEF57}"/>
+                <a16:creationId xmlns:a16="http://schemas.microsoft.com/office/drawing/2014/main" id="{89C1D536-869C-189C-49BF-A58DD1EF5B1D}"/>
               </a:ext>
             </a:extLst>
           </p:cNvPr>
@@ -4562,7 +4565,7 @@
             <a:hlinkClick r:id="" action="ppaction://media"/>
             <a:extLst>
               <a:ext uri="{FF2B5EF4-FFF2-40B4-BE49-F238E27FC236}">
-                <a16:creationId xmlns:a16="http://schemas.microsoft.com/office/drawing/2014/main" id="{501A2729-F5F9-D88E-8BF2-6C1946F803F0}"/>
+                <a16:creationId xmlns:a16="http://schemas.microsoft.com/office/drawing/2014/main" id="{C1191B00-14A2-DA77-207E-8554CF6171A7}"/>
               </a:ext>
             </a:extLst>
           </p:cNvPr>
@@ -4597,7 +4600,7 @@
     </p:spTree>
     <p:extLst>
       <p:ext uri="{BB962C8B-B14F-4D97-AF65-F5344CB8AC3E}">
-        <p14:creationId xmlns:p14="http://schemas.microsoft.com/office/powerpoint/2010/main" val="3220726660"/>
+        <p14:creationId xmlns:p14="http://schemas.microsoft.com/office/powerpoint/2010/main" val="2447904622"/>
       </p:ext>
     </p:extLst>
   </p:cSld>
@@ -4721,7 +4724,7 @@
           <p:cNvPr id="2" name="テキスト ボックス 1">
             <a:extLst>
               <a:ext uri="{FF2B5EF4-FFF2-40B4-BE49-F238E27FC236}">
-                <a16:creationId xmlns:a16="http://schemas.microsoft.com/office/drawing/2014/main" id="{29E31C38-C3D7-85D2-ADED-FC0A1EFE8BDE}"/>
+                <a16:creationId xmlns:a16="http://schemas.microsoft.com/office/drawing/2014/main" id="{5BD77D54-815D-7383-B018-F88B52D8EED6}"/>
               </a:ext>
             </a:extLst>
           </p:cNvPr>
@@ -4767,7 +4770,7 @@
           <p:cNvPr id="3" name="テキスト ボックス 2">
             <a:extLst>
               <a:ext uri="{FF2B5EF4-FFF2-40B4-BE49-F238E27FC236}">
-                <a16:creationId xmlns:a16="http://schemas.microsoft.com/office/drawing/2014/main" id="{94FF2A4C-2390-B3E6-68F6-F8EA72F55420}"/>
+                <a16:creationId xmlns:a16="http://schemas.microsoft.com/office/drawing/2014/main" id="{D748004E-F9E5-DC4D-A4D5-7CAAD5888177}"/>
               </a:ext>
             </a:extLst>
           </p:cNvPr>
@@ -4807,7 +4810,7 @@
           <p:cNvPr id="4" name="テキスト ボックス 3">
             <a:extLst>
               <a:ext uri="{FF2B5EF4-FFF2-40B4-BE49-F238E27FC236}">
-                <a16:creationId xmlns:a16="http://schemas.microsoft.com/office/drawing/2014/main" id="{A7963EF1-1271-48A7-F302-C74FA0EC41E5}"/>
+                <a16:creationId xmlns:a16="http://schemas.microsoft.com/office/drawing/2014/main" id="{45A12AFC-5917-3FEC-5DA3-A1AAFDA68227}"/>
               </a:ext>
             </a:extLst>
           </p:cNvPr>
@@ -4917,7 +4920,7 @@
           <p:cNvPr id="5" name="テキスト ボックス 4">
             <a:extLst>
               <a:ext uri="{FF2B5EF4-FFF2-40B4-BE49-F238E27FC236}">
-                <a16:creationId xmlns:a16="http://schemas.microsoft.com/office/drawing/2014/main" id="{5519BBFA-24C2-2B4C-AF84-F5F8E57652CB}"/>
+                <a16:creationId xmlns:a16="http://schemas.microsoft.com/office/drawing/2014/main" id="{92569523-6791-F041-F392-61054710C87E}"/>
               </a:ext>
             </a:extLst>
           </p:cNvPr>
@@ -4964,7 +4967,7 @@
             <a:hlinkClick r:id="" action="ppaction://media"/>
             <a:extLst>
               <a:ext uri="{FF2B5EF4-FFF2-40B4-BE49-F238E27FC236}">
-                <a16:creationId xmlns:a16="http://schemas.microsoft.com/office/drawing/2014/main" id="{53B1BC8A-2B2B-26EA-2896-FA7AC56515BE}"/>
+                <a16:creationId xmlns:a16="http://schemas.microsoft.com/office/drawing/2014/main" id="{A1CA6ABB-F941-E352-21FA-808F5A8D1437}"/>
               </a:ext>
             </a:extLst>
           </p:cNvPr>
@@ -4999,7 +5002,7 @@
     </p:spTree>
     <p:extLst>
       <p:ext uri="{BB962C8B-B14F-4D97-AF65-F5344CB8AC3E}">
-        <p14:creationId xmlns:p14="http://schemas.microsoft.com/office/powerpoint/2010/main" val="1138191383"/>
+        <p14:creationId xmlns:p14="http://schemas.microsoft.com/office/powerpoint/2010/main" val="3003245653"/>
       </p:ext>
     </p:extLst>
   </p:cSld>
@@ -5123,7 +5126,7 @@
           <p:cNvPr id="2" name="テキスト ボックス 1">
             <a:extLst>
               <a:ext uri="{FF2B5EF4-FFF2-40B4-BE49-F238E27FC236}">
-                <a16:creationId xmlns:a16="http://schemas.microsoft.com/office/drawing/2014/main" id="{A6AA6707-E18B-3544-1287-40109A2EDBE0}"/>
+                <a16:creationId xmlns:a16="http://schemas.microsoft.com/office/drawing/2014/main" id="{4BA88D87-D237-384E-C09C-E340B2F7E1F6}"/>
               </a:ext>
             </a:extLst>
           </p:cNvPr>
@@ -5169,7 +5172,7 @@
           <p:cNvPr id="3" name="テキスト ボックス 2">
             <a:extLst>
               <a:ext uri="{FF2B5EF4-FFF2-40B4-BE49-F238E27FC236}">
-                <a16:creationId xmlns:a16="http://schemas.microsoft.com/office/drawing/2014/main" id="{9B5E4AEA-CB31-3586-1ED8-C81F24492F03}"/>
+                <a16:creationId xmlns:a16="http://schemas.microsoft.com/office/drawing/2014/main" id="{1D81AE11-506B-8370-4150-F8DB6119E741}"/>
               </a:ext>
             </a:extLst>
           </p:cNvPr>
@@ -5209,7 +5212,7 @@
           <p:cNvPr id="4" name="テキスト ボックス 3">
             <a:extLst>
               <a:ext uri="{FF2B5EF4-FFF2-40B4-BE49-F238E27FC236}">
-                <a16:creationId xmlns:a16="http://schemas.microsoft.com/office/drawing/2014/main" id="{0387181A-CD59-1397-0FFD-F33B312966E5}"/>
+                <a16:creationId xmlns:a16="http://schemas.microsoft.com/office/drawing/2014/main" id="{89FCEF06-3647-FF1C-FEE2-0E68019B0284}"/>
               </a:ext>
             </a:extLst>
           </p:cNvPr>
@@ -5233,20 +5236,14 @@
           <a:lstStyle/>
           <a:p>
             <a:r>
-              <a:rPr kumimoji="1" lang="en-US" altLang="ja-JP" sz="2000">
+              <a:rPr kumimoji="1" lang="ja-JP" altLang="en-US" sz="2000">
                 <a:solidFill>
                   <a:srgbClr val="333333"/>
                 </a:solidFill>
                 <a:latin typeface="Arial" panose="020B0604020202020204" pitchFamily="34" charset="0"/>
               </a:rPr>
-              <a:t>Enrich paid question explanations</a:t>
-            </a:r>
-            <a:endParaRPr kumimoji="1" lang="ja-JP" altLang="en-US" sz="2000">
-              <a:solidFill>
-                <a:srgbClr val="333333"/>
-              </a:solidFill>
-              <a:latin typeface="Arial" panose="020B0604020202020204" pitchFamily="34" charset="0"/>
-            </a:endParaRPr>
+              <a:t>直近のコミットでは、実装の見直しと継続的な改善が行われました。</a:t>
+            </a:r>
           </a:p>
         </p:txBody>
       </p:sp>
@@ -5255,7 +5252,7 @@
           <p:cNvPr id="5" name="テキスト ボックス 4">
             <a:extLst>
               <a:ext uri="{FF2B5EF4-FFF2-40B4-BE49-F238E27FC236}">
-                <a16:creationId xmlns:a16="http://schemas.microsoft.com/office/drawing/2014/main" id="{33D32C1F-B259-4B0A-5DE5-339FF15915AD}"/>
+                <a16:creationId xmlns:a16="http://schemas.microsoft.com/office/drawing/2014/main" id="{94BA5933-059F-F1B3-788A-941186B4E3AD}"/>
               </a:ext>
             </a:extLst>
           </p:cNvPr>
@@ -5302,7 +5299,7 @@
             <a:hlinkClick r:id="" action="ppaction://media"/>
             <a:extLst>
               <a:ext uri="{FF2B5EF4-FFF2-40B4-BE49-F238E27FC236}">
-                <a16:creationId xmlns:a16="http://schemas.microsoft.com/office/drawing/2014/main" id="{7224EB24-3051-A932-F96A-0CCA0CC0517A}"/>
+                <a16:creationId xmlns:a16="http://schemas.microsoft.com/office/drawing/2014/main" id="{8B4A4C82-5A33-01F1-320E-EB1D01162526}"/>
               </a:ext>
             </a:extLst>
           </p:cNvPr>
@@ -5337,7 +5334,7 @@
     </p:spTree>
     <p:extLst>
       <p:ext uri="{BB962C8B-B14F-4D97-AF65-F5344CB8AC3E}">
-        <p14:creationId xmlns:p14="http://schemas.microsoft.com/office/powerpoint/2010/main" val="1760666743"/>
+        <p14:creationId xmlns:p14="http://schemas.microsoft.com/office/powerpoint/2010/main" val="3137151249"/>
       </p:ext>
     </p:extLst>
   </p:cSld>
@@ -5346,10 +5343,10 @@
   </p:clrMapOvr>
   <mc:AlternateContent xmlns:mc="http://schemas.openxmlformats.org/markup-compatibility/2006">
     <mc:Choice xmlns:p14="http://schemas.microsoft.com/office/powerpoint/2010/main" Requires="p14">
-      <p:transition spd="slow" p14:dur="2000" advTm="8000"/>
+      <p:transition spd="slow" p14:dur="2000" advTm="7000"/>
     </mc:Choice>
     <mc:Fallback>
-      <p:transition spd="slow" advTm="8000"/>
+      <p:transition spd="slow" advTm="7000"/>
     </mc:Fallback>
   </mc:AlternateContent>
   <p:timing>
@@ -5380,7 +5377,7 @@
                                   <p:childTnLst>
                                     <p:cmd type="call" cmd="playFrom(0.0)">
                                       <p:cBhvr>
-                                        <p:cTn id="6" dur="7011" fill="hold"/>
+                                        <p:cTn id="6" dur="6076" fill="hold"/>
                                         <p:tgtEl>
                                           <p:spTgt spid="6"/>
                                         </p:tgtEl>
@@ -5461,7 +5458,7 @@
           <p:cNvPr id="2" name="テキスト ボックス 1">
             <a:extLst>
               <a:ext uri="{FF2B5EF4-FFF2-40B4-BE49-F238E27FC236}">
-                <a16:creationId xmlns:a16="http://schemas.microsoft.com/office/drawing/2014/main" id="{BC764C88-BFCA-1BDE-FE58-5AA7E3DBFF80}"/>
+                <a16:creationId xmlns:a16="http://schemas.microsoft.com/office/drawing/2014/main" id="{96109824-E7F2-608B-DC34-5ECD17738D1A}"/>
               </a:ext>
             </a:extLst>
           </p:cNvPr>
@@ -5507,7 +5504,7 @@
           <p:cNvPr id="3" name="テキスト ボックス 2">
             <a:extLst>
               <a:ext uri="{FF2B5EF4-FFF2-40B4-BE49-F238E27FC236}">
-                <a16:creationId xmlns:a16="http://schemas.microsoft.com/office/drawing/2014/main" id="{ACD7F2D6-2517-6604-76D6-5377E911562E}"/>
+                <a16:creationId xmlns:a16="http://schemas.microsoft.com/office/drawing/2014/main" id="{9C1F8AA4-E9F2-7C76-ABEC-824EB4063A93}"/>
               </a:ext>
             </a:extLst>
           </p:cNvPr>
@@ -5547,7 +5544,7 @@
           <p:cNvPr id="4" name="テキスト ボックス 3">
             <a:extLst>
               <a:ext uri="{FF2B5EF4-FFF2-40B4-BE49-F238E27FC236}">
-                <a16:creationId xmlns:a16="http://schemas.microsoft.com/office/drawing/2014/main" id="{C2A8AB1C-DD50-8763-00C4-3550BE3AAF93}"/>
+                <a16:creationId xmlns:a16="http://schemas.microsoft.com/office/drawing/2014/main" id="{DC7A6CA9-C739-1C96-F92C-53E8E7EF50F9}"/>
               </a:ext>
             </a:extLst>
           </p:cNvPr>
@@ -5612,7 +5609,7 @@
           <p:cNvPr id="5" name="テキスト ボックス 4">
             <a:extLst>
               <a:ext uri="{FF2B5EF4-FFF2-40B4-BE49-F238E27FC236}">
-                <a16:creationId xmlns:a16="http://schemas.microsoft.com/office/drawing/2014/main" id="{23BCF1E4-D370-D582-3E88-5E45B35A3772}"/>
+                <a16:creationId xmlns:a16="http://schemas.microsoft.com/office/drawing/2014/main" id="{CA252D30-4CEB-A501-8DA9-24A712A644B8}"/>
               </a:ext>
             </a:extLst>
           </p:cNvPr>
@@ -5659,7 +5656,7 @@
             <a:hlinkClick r:id="" action="ppaction://media"/>
             <a:extLst>
               <a:ext uri="{FF2B5EF4-FFF2-40B4-BE49-F238E27FC236}">
-                <a16:creationId xmlns:a16="http://schemas.microsoft.com/office/drawing/2014/main" id="{71F7D290-AF17-784F-193B-0E81BAF5A7AE}"/>
+                <a16:creationId xmlns:a16="http://schemas.microsoft.com/office/drawing/2014/main" id="{03F5C6C8-7998-FA34-B722-5FC8163E3DB3}"/>
               </a:ext>
             </a:extLst>
           </p:cNvPr>
@@ -5694,7 +5691,7 @@
     </p:spTree>
     <p:extLst>
       <p:ext uri="{BB962C8B-B14F-4D97-AF65-F5344CB8AC3E}">
-        <p14:creationId xmlns:p14="http://schemas.microsoft.com/office/powerpoint/2010/main" val="2952014076"/>
+        <p14:creationId xmlns:p14="http://schemas.microsoft.com/office/powerpoint/2010/main" val="2428828810"/>
       </p:ext>
     </p:extLst>
   </p:cSld>
